--- a/catalog/editorial/templates/ed_metrics_breakdown_left_3.pptx
+++ b/catalog/editorial/templates/ed_metrics_breakdown_left_3.pptx
@@ -3577,7 +3577,7 @@
           <a:noFill/>
         </p:spPr>
         <p:txBody>
-          <a:bodyPr wrap="square" lIns="18288" rIns="18288" tIns="13716" bIns="13716">
+          <a:bodyPr wrap="square" anchor="t" lIns="18288" rIns="18288" tIns="13716" bIns="13716">
             <a:noAutofit/>
           </a:bodyPr>
           <a:lstStyle/>
@@ -3632,7 +3632,7 @@
           <a:noFill/>
         </p:spPr>
         <p:txBody>
-          <a:bodyPr wrap="square" lIns="18288" rIns="18288" tIns="13716" bIns="13716">
+          <a:bodyPr wrap="square" anchor="t" lIns="18288" rIns="18288" tIns="13716" bIns="13716">
             <a:noAutofit/>
           </a:bodyPr>
           <a:lstStyle/>
@@ -3687,7 +3687,7 @@
           <a:noFill/>
         </p:spPr>
         <p:txBody>
-          <a:bodyPr wrap="square" lIns="18288" rIns="18288" tIns="13716" bIns="13716">
+          <a:bodyPr wrap="square" anchor="t" lIns="18288" rIns="18288" tIns="13716" bIns="13716">
             <a:noAutofit/>
           </a:bodyPr>
           <a:lstStyle/>
@@ -3786,7 +3786,7 @@
           <a:noFill/>
         </p:spPr>
         <p:txBody>
-          <a:bodyPr wrap="square" lIns="18288" rIns="18288" tIns="13716" bIns="13716">
+          <a:bodyPr wrap="square" anchor="t" lIns="18288" rIns="18288" tIns="13716" bIns="13716">
             <a:noAutofit/>
           </a:bodyPr>
           <a:lstStyle/>
@@ -3841,7 +3841,7 @@
           <a:noFill/>
         </p:spPr>
         <p:txBody>
-          <a:bodyPr wrap="square" lIns="18288" rIns="18288" tIns="13716" bIns="13716">
+          <a:bodyPr wrap="square" anchor="t" lIns="18288" rIns="18288" tIns="13716" bIns="13716">
             <a:noAutofit/>
           </a:bodyPr>
           <a:lstStyle/>
@@ -3940,7 +3940,7 @@
           <a:noFill/>
         </p:spPr>
         <p:txBody>
-          <a:bodyPr wrap="square" lIns="18288" rIns="18288" tIns="13716" bIns="13716">
+          <a:bodyPr wrap="square" anchor="t" lIns="18288" rIns="18288" tIns="13716" bIns="13716">
             <a:noAutofit/>
           </a:bodyPr>
           <a:lstStyle/>
@@ -3995,7 +3995,7 @@
           <a:noFill/>
         </p:spPr>
         <p:txBody>
-          <a:bodyPr wrap="square" lIns="18288" rIns="18288" tIns="13716" bIns="13716">
+          <a:bodyPr wrap="square" anchor="t" lIns="18288" rIns="18288" tIns="13716" bIns="13716">
             <a:noAutofit/>
           </a:bodyPr>
           <a:lstStyle/>
@@ -4050,7 +4050,7 @@
           <a:noFill/>
         </p:spPr>
         <p:txBody>
-          <a:bodyPr wrap="square" lIns="18288" rIns="18288" tIns="13716" bIns="13716">
+          <a:bodyPr wrap="square" anchor="t" lIns="18288" rIns="18288" tIns="13716" bIns="13716">
             <a:noAutofit/>
           </a:bodyPr>
           <a:lstStyle/>
@@ -4142,8 +4142,8 @@
         </p:nvSpPr>
         <p:spPr>
           <a:xfrm>
-            <a:off x="3931920" y="2286000"/>
-            <a:ext cx="1920240" cy="448056"/>
+            <a:off x="3931920" y="2167127"/>
+            <a:ext cx="1920240" cy="1133856"/>
           </a:xfrm>
           <a:prstGeom prst="rect">
             <a:avLst/>
@@ -4151,7 +4151,7 @@
           <a:noFill/>
         </p:spPr>
         <p:txBody>
-          <a:bodyPr wrap="square" lIns="18288" rIns="18288" tIns="13716" bIns="13716">
+          <a:bodyPr wrap="square" anchor="ctr" lIns="18288" rIns="18288" tIns="13716" bIns="13716">
             <a:noAutofit/>
           </a:bodyPr>
           <a:lstStyle/>
@@ -4197,8 +4197,8 @@
         </p:nvSpPr>
         <p:spPr>
           <a:xfrm>
-            <a:off x="5925312" y="2322576"/>
-            <a:ext cx="2011680" cy="649224"/>
+            <a:off x="5925312" y="2167127"/>
+            <a:ext cx="2011680" cy="1133856"/>
           </a:xfrm>
           <a:prstGeom prst="rect">
             <a:avLst/>
@@ -4206,7 +4206,7 @@
           <a:noFill/>
         </p:spPr>
         <p:txBody>
-          <a:bodyPr wrap="square" lIns="18288" rIns="18288" tIns="13716" bIns="13716">
+          <a:bodyPr wrap="square" anchor="ctr" lIns="18288" rIns="18288" tIns="13716" bIns="13716">
             <a:noAutofit/>
           </a:bodyPr>
           <a:lstStyle/>
@@ -4252,8 +4252,8 @@
         </p:nvSpPr>
         <p:spPr>
           <a:xfrm>
-            <a:off x="8165592" y="2322576"/>
-            <a:ext cx="3200400" cy="822960"/>
+            <a:off x="8165592" y="2167127"/>
+            <a:ext cx="3200400" cy="1133856"/>
           </a:xfrm>
           <a:prstGeom prst="rect">
             <a:avLst/>
@@ -4261,7 +4261,7 @@
           <a:noFill/>
         </p:spPr>
         <p:txBody>
-          <a:bodyPr wrap="square" lIns="18288" rIns="18288" tIns="13716" bIns="13716">
+          <a:bodyPr wrap="square" anchor="ctr" lIns="18288" rIns="18288" tIns="13716" bIns="13716">
             <a:noAutofit/>
           </a:bodyPr>
           <a:lstStyle/>
@@ -4353,8 +4353,8 @@
         </p:nvSpPr>
         <p:spPr>
           <a:xfrm>
-            <a:off x="3931920" y="3602736"/>
-            <a:ext cx="1920240" cy="448056"/>
+            <a:off x="3931920" y="3483863"/>
+            <a:ext cx="1920240" cy="1133856"/>
           </a:xfrm>
           <a:prstGeom prst="rect">
             <a:avLst/>
@@ -4362,7 +4362,7 @@
           <a:noFill/>
         </p:spPr>
         <p:txBody>
-          <a:bodyPr wrap="square" lIns="18288" rIns="18288" tIns="13716" bIns="13716">
+          <a:bodyPr wrap="square" anchor="ctr" lIns="18288" rIns="18288" tIns="13716" bIns="13716">
             <a:noAutofit/>
           </a:bodyPr>
           <a:lstStyle/>
@@ -4408,8 +4408,8 @@
         </p:nvSpPr>
         <p:spPr>
           <a:xfrm>
-            <a:off x="5925312" y="3639312"/>
-            <a:ext cx="2011680" cy="649224"/>
+            <a:off x="5925312" y="3483863"/>
+            <a:ext cx="2011680" cy="1133856"/>
           </a:xfrm>
           <a:prstGeom prst="rect">
             <a:avLst/>
@@ -4417,7 +4417,7 @@
           <a:noFill/>
         </p:spPr>
         <p:txBody>
-          <a:bodyPr wrap="square" lIns="18288" rIns="18288" tIns="13716" bIns="13716">
+          <a:bodyPr wrap="square" anchor="ctr" lIns="18288" rIns="18288" tIns="13716" bIns="13716">
             <a:noAutofit/>
           </a:bodyPr>
           <a:lstStyle/>
@@ -4463,8 +4463,8 @@
         </p:nvSpPr>
         <p:spPr>
           <a:xfrm>
-            <a:off x="8165592" y="3639312"/>
-            <a:ext cx="3200400" cy="822960"/>
+            <a:off x="8165592" y="3483863"/>
+            <a:ext cx="3200400" cy="1133856"/>
           </a:xfrm>
           <a:prstGeom prst="rect">
             <a:avLst/>
@@ -4472,7 +4472,7 @@
           <a:noFill/>
         </p:spPr>
         <p:txBody>
-          <a:bodyPr wrap="square" lIns="18288" rIns="18288" tIns="13716" bIns="13716">
+          <a:bodyPr wrap="square" anchor="ctr" lIns="18288" rIns="18288" tIns="13716" bIns="13716">
             <a:noAutofit/>
           </a:bodyPr>
           <a:lstStyle/>
@@ -4564,8 +4564,8 @@
         </p:nvSpPr>
         <p:spPr>
           <a:xfrm>
-            <a:off x="3931920" y="4919472"/>
-            <a:ext cx="1920240" cy="448056"/>
+            <a:off x="3931920" y="4800600"/>
+            <a:ext cx="1920240" cy="1133856"/>
           </a:xfrm>
           <a:prstGeom prst="rect">
             <a:avLst/>
@@ -4573,7 +4573,7 @@
           <a:noFill/>
         </p:spPr>
         <p:txBody>
-          <a:bodyPr wrap="square" lIns="18288" rIns="18288" tIns="13716" bIns="13716">
+          <a:bodyPr wrap="square" anchor="ctr" lIns="18288" rIns="18288" tIns="13716" bIns="13716">
             <a:noAutofit/>
           </a:bodyPr>
           <a:lstStyle/>
@@ -4619,8 +4619,8 @@
         </p:nvSpPr>
         <p:spPr>
           <a:xfrm>
-            <a:off x="5925312" y="4956048"/>
-            <a:ext cx="2011680" cy="649224"/>
+            <a:off x="5925312" y="4800600"/>
+            <a:ext cx="2011680" cy="1133856"/>
           </a:xfrm>
           <a:prstGeom prst="rect">
             <a:avLst/>
@@ -4628,7 +4628,7 @@
           <a:noFill/>
         </p:spPr>
         <p:txBody>
-          <a:bodyPr wrap="square" lIns="18288" rIns="18288" tIns="13716" bIns="13716">
+          <a:bodyPr wrap="square" anchor="ctr" lIns="18288" rIns="18288" tIns="13716" bIns="13716">
             <a:noAutofit/>
           </a:bodyPr>
           <a:lstStyle/>
@@ -4674,8 +4674,8 @@
         </p:nvSpPr>
         <p:spPr>
           <a:xfrm>
-            <a:off x="8165592" y="4956048"/>
-            <a:ext cx="3200400" cy="822960"/>
+            <a:off x="8165592" y="4800600"/>
+            <a:ext cx="3200400" cy="1133856"/>
           </a:xfrm>
           <a:prstGeom prst="rect">
             <a:avLst/>
@@ -4683,7 +4683,7 @@
           <a:noFill/>
         </p:spPr>
         <p:txBody>
-          <a:bodyPr wrap="square" lIns="18288" rIns="18288" tIns="13716" bIns="13716">
+          <a:bodyPr wrap="square" anchor="ctr" lIns="18288" rIns="18288" tIns="13716" bIns="13716">
             <a:noAutofit/>
           </a:bodyPr>
           <a:lstStyle/>
